--- a/decks/maths-directed/maths-directed_ch4_subtracting.pptx
+++ b/decks/maths-directed/maths-directed_ch4_subtracting.pptx
@@ -121,47 +121,47 @@
   <p:extLst>
     <p:ext uri="{521415D9-36F7-43E2-AB2F-B90AF26B5E84}">
       <p14:sectionLst xmlns:p14="http://schemas.microsoft.com/office/powerpoint/2010/main">
-        <p14:section name="Opening" id="{86493a3b-2292-b131-30c6-11374d16bc47}">
+        <p14:section name="Opening" id="{b6af262d-be45-8eef-630c-321e7f76cab5}">
           <p14:sldIdLst>
             <p14:sldId id="256"/>
           </p14:sldIdLst>
         </p14:section>
-        <p14:section name="Gate" id="{b25448d7-6428-1aef-775b-0a5eef30ccda}">
+        <p14:section name="Gate" id="{9e89f67e-2203-0188-e07c-a1a893bf2e13}">
           <p14:sldIdLst>
             <p14:sldId id="257"/>
             <p14:sldId id="258"/>
           </p14:sldIdLst>
         </p14:section>
-        <p14:section name="Pre-teach" id="{bc7ca0a2-1a26-5643-9e01-5c630b9d5c0a}">
+        <p14:section name="Pre-teach" id="{03db2f2f-51dd-7050-9b90-34fd1bbde09d}">
           <p14:sldIdLst>
             <p14:sldId id="259"/>
           </p14:sldIdLst>
         </p14:section>
-        <p14:section name="Read-along" id="{fa62d997-3ef8-0be3-e7b0-fc688759bf7d}">
+        <p14:section name="Read-along" id="{514c934c-bb4f-4757-7b3b-1b614f88bbb1}">
           <p14:sldIdLst>
             <p14:sldId id="260"/>
             <p14:sldId id="261"/>
           </p14:sldIdLst>
         </p14:section>
-        <p14:section name="Teach" id="{b3c82c28-0137-dbf0-bca1-849253d1598b}">
+        <p14:section name="Teach" id="{4b6b7c72-4354-9e74-01a0-2546f101a41f}">
           <p14:sldIdLst>
             <p14:sldId id="262"/>
             <p14:sldId id="263"/>
             <p14:sldId id="264"/>
           </p14:sldIdLst>
         </p14:section>
-        <p14:section name="Routes" id="{113f6395-9b9a-0343-d3c0-ce64f652f14b}">
+        <p14:section name="Routes" id="{cb350427-0c21-695a-fb9a-9283dc274a78}">
           <p14:sldIdLst>
             <p14:sldId id="265"/>
             <p14:sldId id="266"/>
           </p14:sldIdLst>
         </p14:section>
-        <p14:section name="Close" id="{2316f830-593b-cc1d-5098-c0faef564124}">
+        <p14:section name="Close" id="{c4b265bd-87bf-fb9c-9d75-5fb1cb41ed88}">
           <p14:sldIdLst>
             <p14:sldId id="267"/>
           </p14:sldIdLst>
         </p14:section>
-        <p14:section name="Answers" id="{42b198c4-dfac-49a9-dd04-acf1f5b80613}">
+        <p14:section name="Answers" id="{6128277a-1db0-543b-9da5-610643e3eae1}">
           <p14:sldIdLst>
             <p14:sldId id="268"/>
             <p14:sldId id="269"/>
@@ -944,7 +944,7 @@
             <a:r>
               <a:rPr lang="en-US" dirty="0"/>
               <a:t>Answers — task 1: Subtract a negative number. Reveal the answer; pupils mark their own work in a different colour, then read the "why" together. Same destination for every lane, so one answer serves the whole class.
-Answer: C   14
+Answer: B   14
 Why: Subtracting a negative is the same as adding: 5 − (−9) = 5 + 9 = 14.
 Ask a Support pupil to explain one step, and a Stretch pupil to share their extension.</a:t>
             </a:r>
@@ -1218,7 +1218,7 @@
               <a:rPr lang="en-US" dirty="0"/>
               <a:t>Do now — retrieval. Silent, no notes, no help: recall comes before any support. Give about four minutes.
 1. Work out −6 + (−3).  →  −9
-2. Work out 7 − 10.  →  B   −3
+2. Work out 7 − 10.  →  C   −3
 3. Subtracting a negative number is the same as ___ a positive number.  →  adding
 Circulate: who gets 3/3 (Stretch route), 2/3 (Core), 0–1 (Support)? Use this to route pupils later in the lesson.</a:t>
             </a:r>
@@ -1310,7 +1310,7 @@
               <a:rPr lang="en-US" dirty="0"/>
               <a:t>Answers — pupils mark their own in a different colour, then hands up for 3/3, 2/3, 1/3.
 1. −9. Both numbers are negative, so there are no zero pairs: 6 + 3 = 9, and the answer is −9.
-2. B   −3. Take 7 to reach zero, then 3 more. You land on −3.
+2. C   −3. Take 7 to reach zero, then 3 more. You land on −3.
 3. adding. Taking away negative counters leaves extra positive counters, so the value goes up.
 Say the route each score points to: 3/3 Stretch, 2/3 Core, 0–1 Support. Pupils may choose to move up.</a:t>
             </a:r>
@@ -3795,63 +3795,63 @@
                 <a:ea typeface="Calibri" pitchFamily="34" charset="-122"/>
                 <a:cs typeface="Calibri" pitchFamily="34" charset="-120"/>
               </a:rPr>
+              <a:t>4      </a:t>
+            </a:r>
+            <a:pPr algn="ctr" indent="0" marL="0">
+              <a:buNone/>
+            </a:pPr>
+            <a:r>
+              <a:rPr lang="en-US" sz="1800" b="1" dirty="0">
+                <a:solidFill>
+                  <a:srgbClr val="B8862B"/>
+                </a:solidFill>
+                <a:latin typeface="Calibri" pitchFamily="34" charset="0"/>
+                <a:ea typeface="Calibri" pitchFamily="34" charset="-122"/>
+                <a:cs typeface="Calibri" pitchFamily="34" charset="-120"/>
+              </a:rPr>
+              <a:t>B  </a:t>
+            </a:r>
+            <a:pPr algn="ctr" indent="0" marL="0">
+              <a:buNone/>
+            </a:pPr>
+            <a:r>
+              <a:rPr lang="en-US" sz="1800" dirty="0">
+                <a:solidFill>
+                  <a:srgbClr val="1E2229"/>
+                </a:solidFill>
+                <a:latin typeface="Calibri" pitchFamily="34" charset="0"/>
+                <a:ea typeface="Calibri" pitchFamily="34" charset="-122"/>
+                <a:cs typeface="Calibri" pitchFamily="34" charset="-120"/>
+              </a:rPr>
+              <a:t>14      </a:t>
+            </a:r>
+            <a:pPr algn="ctr" indent="0" marL="0">
+              <a:buNone/>
+            </a:pPr>
+            <a:r>
+              <a:rPr lang="en-US" sz="1800" b="1" dirty="0">
+                <a:solidFill>
+                  <a:srgbClr val="B8862B"/>
+                </a:solidFill>
+                <a:latin typeface="Calibri" pitchFamily="34" charset="0"/>
+                <a:ea typeface="Calibri" pitchFamily="34" charset="-122"/>
+                <a:cs typeface="Calibri" pitchFamily="34" charset="-120"/>
+              </a:rPr>
+              <a:t>C  </a:t>
+            </a:r>
+            <a:pPr algn="ctr" indent="0" marL="0">
+              <a:buNone/>
+            </a:pPr>
+            <a:r>
+              <a:rPr lang="en-US" sz="1800" dirty="0">
+                <a:solidFill>
+                  <a:srgbClr val="1E2229"/>
+                </a:solidFill>
+                <a:latin typeface="Calibri" pitchFamily="34" charset="0"/>
+                <a:ea typeface="Calibri" pitchFamily="34" charset="-122"/>
+                <a:cs typeface="Calibri" pitchFamily="34" charset="-120"/>
+              </a:rPr>
               <a:t>−4      </a:t>
-            </a:r>
-            <a:pPr algn="ctr" indent="0" marL="0">
-              <a:buNone/>
-            </a:pPr>
-            <a:r>
-              <a:rPr lang="en-US" sz="1800" b="1" dirty="0">
-                <a:solidFill>
-                  <a:srgbClr val="B8862B"/>
-                </a:solidFill>
-                <a:latin typeface="Calibri" pitchFamily="34" charset="0"/>
-                <a:ea typeface="Calibri" pitchFamily="34" charset="-122"/>
-                <a:cs typeface="Calibri" pitchFamily="34" charset="-120"/>
-              </a:rPr>
-              <a:t>B  </a:t>
-            </a:r>
-            <a:pPr algn="ctr" indent="0" marL="0">
-              <a:buNone/>
-            </a:pPr>
-            <a:r>
-              <a:rPr lang="en-US" sz="1800" dirty="0">
-                <a:solidFill>
-                  <a:srgbClr val="1E2229"/>
-                </a:solidFill>
-                <a:latin typeface="Calibri" pitchFamily="34" charset="0"/>
-                <a:ea typeface="Calibri" pitchFamily="34" charset="-122"/>
-                <a:cs typeface="Calibri" pitchFamily="34" charset="-120"/>
-              </a:rPr>
-              <a:t>4      </a:t>
-            </a:r>
-            <a:pPr algn="ctr" indent="0" marL="0">
-              <a:buNone/>
-            </a:pPr>
-            <a:r>
-              <a:rPr lang="en-US" sz="1800" b="1" dirty="0">
-                <a:solidFill>
-                  <a:srgbClr val="B8862B"/>
-                </a:solidFill>
-                <a:latin typeface="Calibri" pitchFamily="34" charset="0"/>
-                <a:ea typeface="Calibri" pitchFamily="34" charset="-122"/>
-                <a:cs typeface="Calibri" pitchFamily="34" charset="-120"/>
-              </a:rPr>
-              <a:t>C  </a:t>
-            </a:r>
-            <a:pPr algn="ctr" indent="0" marL="0">
-              <a:buNone/>
-            </a:pPr>
-            <a:r>
-              <a:rPr lang="en-US" sz="1800" dirty="0">
-                <a:solidFill>
-                  <a:srgbClr val="1E2229"/>
-                </a:solidFill>
-                <a:latin typeface="Calibri" pitchFamily="34" charset="0"/>
-                <a:ea typeface="Calibri" pitchFamily="34" charset="-122"/>
-                <a:cs typeface="Calibri" pitchFamily="34" charset="-120"/>
-              </a:rPr>
-              <a:t>14      </a:t>
             </a:r>
             <a:pPr algn="ctr" indent="0" marL="0">
               <a:buNone/>
@@ -6407,7 +6407,7 @@
                 <a:ea typeface="Cambria" pitchFamily="34" charset="-122"/>
                 <a:cs typeface="Cambria" pitchFamily="34" charset="-120"/>
               </a:rPr>
-              <a:t>C   14</a:t>
+              <a:t>B   14</a:t>
             </a:r>
             <a:endParaRPr lang="en-US" sz="1800" dirty="0"/>
           </a:p>
@@ -8168,7 +8168,7 @@
                 <a:ea typeface="Calibri" pitchFamily="34" charset="-122"/>
                 <a:cs typeface="Calibri" pitchFamily="34" charset="-120"/>
               </a:rPr>
-              <a:t>3</a:t>
+              <a:t>17</a:t>
             </a:r>
             <a:endParaRPr lang="en-US" sz="2400" dirty="0"/>
           </a:p>
@@ -8205,7 +8205,7 @@
                 <a:ea typeface="Calibri" pitchFamily="34" charset="-122"/>
                 <a:cs typeface="Calibri" pitchFamily="34" charset="-120"/>
               </a:rPr>
-              <a:t>−3</a:t>
+              <a:t>3</a:t>
             </a:r>
             <a:endParaRPr lang="en-US" sz="2400" dirty="0"/>
           </a:p>
@@ -8242,7 +8242,7 @@
                 <a:ea typeface="Calibri" pitchFamily="34" charset="-122"/>
                 <a:cs typeface="Calibri" pitchFamily="34" charset="-120"/>
               </a:rPr>
-              <a:t>17</a:t>
+              <a:t>−3</a:t>
             </a:r>
             <a:endParaRPr lang="en-US" sz="2400" dirty="0"/>
           </a:p>
@@ -9128,7 +9128,7 @@
                 <a:ea typeface="Calibri" pitchFamily="34" charset="-122"/>
                 <a:cs typeface="Calibri" pitchFamily="34" charset="-120"/>
               </a:rPr>
-              <a:t>B   −3</a:t>
+              <a:t>C   −3</a:t>
             </a:r>
             <a:endParaRPr lang="en-US" sz="2200" dirty="0"/>
           </a:p>

--- a/decks/maths-directed/maths-directed_ch4_subtracting.pptx
+++ b/decks/maths-directed/maths-directed_ch4_subtracting.pptx
@@ -121,47 +121,47 @@
   <p:extLst>
     <p:ext uri="{521415D9-36F7-43E2-AB2F-B90AF26B5E84}">
       <p14:sectionLst xmlns:p14="http://schemas.microsoft.com/office/powerpoint/2010/main">
-        <p14:section name="Opening" id="{b6af262d-be45-8eef-630c-321e7f76cab5}">
+        <p14:section name="Opening" id="{7353c75c-2434-5d2c-b74d-e3f66f8654ce}">
           <p14:sldIdLst>
             <p14:sldId id="256"/>
           </p14:sldIdLst>
         </p14:section>
-        <p14:section name="Gate" id="{9e89f67e-2203-0188-e07c-a1a893bf2e13}">
+        <p14:section name="Gate" id="{6699c271-c36c-9442-1b2d-65166e3b10ec}">
           <p14:sldIdLst>
             <p14:sldId id="257"/>
             <p14:sldId id="258"/>
           </p14:sldIdLst>
         </p14:section>
-        <p14:section name="Pre-teach" id="{03db2f2f-51dd-7050-9b90-34fd1bbde09d}">
+        <p14:section name="Pre-teach" id="{be6b6614-f74f-47c9-8a57-ca324b327c99}">
           <p14:sldIdLst>
             <p14:sldId id="259"/>
           </p14:sldIdLst>
         </p14:section>
-        <p14:section name="Read-along" id="{514c934c-bb4f-4757-7b3b-1b614f88bbb1}">
+        <p14:section name="Read-along" id="{103ac4ea-cc36-eeee-1b15-48924cb9463c}">
           <p14:sldIdLst>
             <p14:sldId id="260"/>
             <p14:sldId id="261"/>
           </p14:sldIdLst>
         </p14:section>
-        <p14:section name="Teach" id="{4b6b7c72-4354-9e74-01a0-2546f101a41f}">
+        <p14:section name="Teach" id="{d7ff7d3e-0d8c-46a2-e8e9-de8d3d21a52c}">
           <p14:sldIdLst>
             <p14:sldId id="262"/>
             <p14:sldId id="263"/>
             <p14:sldId id="264"/>
           </p14:sldIdLst>
         </p14:section>
-        <p14:section name="Routes" id="{cb350427-0c21-695a-fb9a-9283dc274a78}">
+        <p14:section name="Routes" id="{7affc92d-b290-0b57-d801-f088c15f889d}">
           <p14:sldIdLst>
             <p14:sldId id="265"/>
             <p14:sldId id="266"/>
           </p14:sldIdLst>
         </p14:section>
-        <p14:section name="Close" id="{c4b265bd-87bf-fb9c-9d75-5fb1cb41ed88}">
+        <p14:section name="Close" id="{cb6d2e12-5a11-30b6-8e7f-da34b0328c13}">
           <p14:sldIdLst>
             <p14:sldId id="267"/>
           </p14:sldIdLst>
         </p14:section>
-        <p14:section name="Answers" id="{6128277a-1db0-543b-9da5-610643e3eae1}">
+        <p14:section name="Answers" id="{17e3f0d4-32d9-1a40-6c9d-5314a6bf3e22}">
           <p14:sldIdLst>
             <p14:sldId id="268"/>
             <p14:sldId id="269"/>
